--- a/presentations/15-teaching-construction-kit/15-teaching-construction-kit-lab.pptx
+++ b/presentations/15-teaching-construction-kit/15-teaching-construction-kit-lab.pptx
@@ -136,7 +136,7 @@
   <p:extLst>
     <p:ext uri="{521415D9-36F7-43E2-AB2F-B90AF26B5E84}">
       <p14:sectionLst xmlns:p14="http://schemas.microsoft.com/office/powerpoint/2010/main">
-        <p14:section name="Opening" id="{093104ea-5bac-b886-40ff-080f3fd2da3c}">
+        <p14:section name="Opening" id="{0c6d1cfe-534c-ab08-69e9-8e54f5f34f70}">
           <p14:sldIdLst>
             <p14:sldId id="256"/>
             <p14:sldId id="257"/>
@@ -144,7 +144,7 @@
             <p14:sldId id="259"/>
           </p14:sldIdLst>
         </p14:section>
-        <p14:section name="Install and start" id="{8c7a6e46-1289-5ab8-4b98-786e1f3594f3}">
+        <p14:section name="Install and start" id="{2f17ddc0-91f7-56ba-eac2-8c2c63f8b273}">
           <p14:sldIdLst>
             <p14:sldId id="260"/>
             <p14:sldId id="261"/>
@@ -153,7 +153,7 @@
             <p14:sldId id="264"/>
           </p14:sldIdLst>
         </p14:section>
-        <p14:section name="Import and play" id="{82f0529c-d777-5184-baab-fc6b39a9651c}">
+        <p14:section name="Import and play" id="{7de5200a-9bbe-ea98-cb54-41c95050eab3}">
           <p14:sldIdLst>
             <p14:sldId id="265"/>
             <p14:sldId id="266"/>
@@ -161,7 +161,7 @@
             <p14:sldId id="268"/>
           </p14:sldIdLst>
         </p14:section>
-        <p14:section name="Step and Generate C" id="{5ae34efd-4492-2993-5a24-7ac9bfae0aa8}">
+        <p14:section name="Step and Generate C" id="{90dcb8b8-4657-a78e-9b8f-2c7e08f8afe9}">
           <p14:sldIdLst>
             <p14:sldId id="269"/>
             <p14:sldId id="270"/>
@@ -170,7 +170,7 @@
             <p14:sldId id="273"/>
           </p14:sldIdLst>
         </p14:section>
-        <p14:section name="Micro-teaching" id="{f91cfed4-2e3f-6fac-315a-82770ed8b81e}">
+        <p14:section name="Micro-teaching" id="{b6d25e7d-96ec-0027-0ee2-d8895cb800fd}">
           <p14:sldIdLst>
             <p14:sldId id="274"/>
             <p14:sldId id="275"/>
@@ -180,7 +180,7 @@
             <p14:sldId id="279"/>
           </p14:sldIdLst>
         </p14:section>
-        <p14:section name="Publishing decisions" id="{a549e933-1e30-112c-f48a-e43c88dd6da5}">
+        <p14:section name="Publishing decisions" id="{793e28ce-8683-f78b-1f51-b6e1eb133a2f}">
           <p14:sldIdLst>
             <p14:sldId id="280"/>
             <p14:sldId id="281"/>
@@ -189,7 +189,7 @@
             <p14:sldId id="284"/>
           </p14:sldIdLst>
         </p14:section>
-        <p14:section name="Closing" id="{3e1f9129-567f-9c89-5c53-5d8ae877d1b1}">
+        <p14:section name="Closing" id="{6afee947-3f6f-6430-b900-6253b5f4ad9b}">
           <p14:sldIdLst>
             <p14:sldId id="285"/>
           </p14:sldIdLst>
@@ -1126,7 +1126,8 @@
           <a:p>
             <a:r>
               <a:rPr lang="en-US" dirty="0"/>
-              <a:t>Practise saying 'what will the next number be?' before each click.</a:t>
+              <a:t>Practise saying 'what will the next number be?' before each click.
+</a:t>
             </a:r>
             <a:endParaRPr lang="en-US" dirty="0"/>
           </a:p>
@@ -3062,7 +3063,8 @@
           <a:p>
             <a:r>
               <a:rPr lang="en-US" dirty="0"/>
-              <a:t>If it fails: firewall on the teacher laptop, or client isolation on the Wi-Fi.</a:t>
+              <a:t>If it fails: firewall on the teacher laptop, or client isolation on the Wi-Fi.
+</a:t>
             </a:r>
             <a:endParaRPr lang="en-US" dirty="0"/>
           </a:p>
@@ -4802,12 +4804,12 @@
         </p:nvSpPr>
         <p:spPr>
           <a:xfrm>
-            <a:off x="8092440" y="2834640"/>
-            <a:ext cx="3550615" cy="3383280"/>
+            <a:off x="8092440" y="2788920"/>
+            <a:ext cx="3550615" cy="3429000"/>
           </a:xfrm>
           <a:prstGeom prst="roundRect">
             <a:avLst>
-              <a:gd name="adj" fmla="val 2162"/>
+              <a:gd name="adj" fmla="val 2133"/>
             </a:avLst>
           </a:prstGeom>
           <a:solidFill>
@@ -4829,8 +4831,8 @@
         </p:nvSpPr>
         <p:spPr>
           <a:xfrm>
-            <a:off x="8321040" y="2971800"/>
-            <a:ext cx="3093415" cy="365760"/>
+            <a:off x="8321040" y="2880360"/>
+            <a:ext cx="3093415" cy="310896"/>
           </a:xfrm>
           <a:prstGeom prst="rect">
             <a:avLst/>
@@ -4846,7 +4848,7 @@
               <a:buNone/>
             </a:pPr>
             <a:r>
-              <a:rPr lang="en-US" sz="1500" b="1" dirty="0">
+              <a:rPr lang="en-US" sz="1400" b="1" dirty="0">
                 <a:solidFill>
                   <a:srgbClr val="2F7D4F"/>
                 </a:solidFill>
@@ -4856,7 +4858,7 @@
               </a:rPr>
               <a:t>Expected result</a:t>
             </a:r>
-            <a:endParaRPr lang="en-US" sz="1500" dirty="0"/>
+            <a:endParaRPr lang="en-US" sz="1400" dirty="0"/>
           </a:p>
         </p:txBody>
       </p:sp>
@@ -4868,8 +4870,8 @@
         </p:nvSpPr>
         <p:spPr>
           <a:xfrm>
-            <a:off x="8321040" y="3429000"/>
-            <a:ext cx="3093415" cy="2606040"/>
+            <a:off x="8321040" y="3246120"/>
+            <a:ext cx="3093415" cy="2862072"/>
           </a:xfrm>
           <a:prstGeom prst="rect">
             <a:avLst/>
@@ -5470,12 +5472,12 @@
         </p:nvSpPr>
         <p:spPr>
           <a:xfrm>
-            <a:off x="8092440" y="2834640"/>
-            <a:ext cx="3550615" cy="3383280"/>
+            <a:off x="8092440" y="2788920"/>
+            <a:ext cx="3550615" cy="3429000"/>
           </a:xfrm>
           <a:prstGeom prst="roundRect">
             <a:avLst>
-              <a:gd name="adj" fmla="val 2162"/>
+              <a:gd name="adj" fmla="val 2133"/>
             </a:avLst>
           </a:prstGeom>
           <a:solidFill>
@@ -5497,8 +5499,8 @@
         </p:nvSpPr>
         <p:spPr>
           <a:xfrm>
-            <a:off x="8321040" y="2971800"/>
-            <a:ext cx="3093415" cy="365760"/>
+            <a:off x="8321040" y="2880360"/>
+            <a:ext cx="3093415" cy="310896"/>
           </a:xfrm>
           <a:prstGeom prst="rect">
             <a:avLst/>
@@ -5514,7 +5516,7 @@
               <a:buNone/>
             </a:pPr>
             <a:r>
-              <a:rPr lang="en-US" sz="1500" b="1" dirty="0">
+              <a:rPr lang="en-US" sz="1400" b="1" dirty="0">
                 <a:solidFill>
                   <a:srgbClr val="2F7D4F"/>
                 </a:solidFill>
@@ -5524,7 +5526,7 @@
               </a:rPr>
               <a:t>Expected result</a:t>
             </a:r>
-            <a:endParaRPr lang="en-US" sz="1500" dirty="0"/>
+            <a:endParaRPr lang="en-US" sz="1400" dirty="0"/>
           </a:p>
         </p:txBody>
       </p:sp>
@@ -5536,8 +5538,8 @@
         </p:nvSpPr>
         <p:spPr>
           <a:xfrm>
-            <a:off x="8321040" y="3429000"/>
-            <a:ext cx="3093415" cy="2606040"/>
+            <a:off x="8321040" y="3246120"/>
+            <a:ext cx="3093415" cy="2862072"/>
           </a:xfrm>
           <a:prstGeom prst="rect">
             <a:avLst/>
@@ -6052,12 +6054,12 @@
         </p:nvSpPr>
         <p:spPr>
           <a:xfrm>
-            <a:off x="8092440" y="2834640"/>
-            <a:ext cx="3550615" cy="3383280"/>
+            <a:off x="8092440" y="2788920"/>
+            <a:ext cx="3550615" cy="3429000"/>
           </a:xfrm>
           <a:prstGeom prst="roundRect">
             <a:avLst>
-              <a:gd name="adj" fmla="val 2162"/>
+              <a:gd name="adj" fmla="val 2133"/>
             </a:avLst>
           </a:prstGeom>
           <a:solidFill>
@@ -6079,8 +6081,8 @@
         </p:nvSpPr>
         <p:spPr>
           <a:xfrm>
-            <a:off x="8321040" y="2971800"/>
-            <a:ext cx="3093415" cy="365760"/>
+            <a:off x="8321040" y="2880360"/>
+            <a:ext cx="3093415" cy="310896"/>
           </a:xfrm>
           <a:prstGeom prst="rect">
             <a:avLst/>
@@ -6096,7 +6098,7 @@
               <a:buNone/>
             </a:pPr>
             <a:r>
-              <a:rPr lang="en-US" sz="1500" b="1" dirty="0">
+              <a:rPr lang="en-US" sz="1400" b="1" dirty="0">
                 <a:solidFill>
                   <a:srgbClr val="2F7D4F"/>
                 </a:solidFill>
@@ -6106,7 +6108,7 @@
               </a:rPr>
               <a:t>Expected result</a:t>
             </a:r>
-            <a:endParaRPr lang="en-US" sz="1500" dirty="0"/>
+            <a:endParaRPr lang="en-US" sz="1400" dirty="0"/>
           </a:p>
         </p:txBody>
       </p:sp>
@@ -6118,8 +6120,8 @@
         </p:nvSpPr>
         <p:spPr>
           <a:xfrm>
-            <a:off x="8321040" y="3429000"/>
-            <a:ext cx="3093415" cy="2606040"/>
+            <a:off x="8321040" y="3246120"/>
+            <a:ext cx="3093415" cy="2862072"/>
           </a:xfrm>
           <a:prstGeom prst="rect">
             <a:avLst/>
@@ -6910,12 +6912,12 @@
         </p:nvSpPr>
         <p:spPr>
           <a:xfrm>
-            <a:off x="8092440" y="2834640"/>
-            <a:ext cx="3550615" cy="3383280"/>
+            <a:off x="8092440" y="2788920"/>
+            <a:ext cx="3550615" cy="3429000"/>
           </a:xfrm>
           <a:prstGeom prst="roundRect">
             <a:avLst>
-              <a:gd name="adj" fmla="val 2162"/>
+              <a:gd name="adj" fmla="val 2133"/>
             </a:avLst>
           </a:prstGeom>
           <a:solidFill>
@@ -6937,8 +6939,8 @@
         </p:nvSpPr>
         <p:spPr>
           <a:xfrm>
-            <a:off x="8321040" y="2971800"/>
-            <a:ext cx="3093415" cy="365760"/>
+            <a:off x="8321040" y="2880360"/>
+            <a:ext cx="3093415" cy="310896"/>
           </a:xfrm>
           <a:prstGeom prst="rect">
             <a:avLst/>
@@ -6954,7 +6956,7 @@
               <a:buNone/>
             </a:pPr>
             <a:r>
-              <a:rPr lang="en-US" sz="1500" b="1" dirty="0">
+              <a:rPr lang="en-US" sz="1400" b="1" dirty="0">
                 <a:solidFill>
                   <a:srgbClr val="2F7D4F"/>
                 </a:solidFill>
@@ -6964,7 +6966,7 @@
               </a:rPr>
               <a:t>Expected result</a:t>
             </a:r>
-            <a:endParaRPr lang="en-US" sz="1500" dirty="0"/>
+            <a:endParaRPr lang="en-US" sz="1400" dirty="0"/>
           </a:p>
         </p:txBody>
       </p:sp>
@@ -6976,8 +6978,8 @@
         </p:nvSpPr>
         <p:spPr>
           <a:xfrm>
-            <a:off x="8321040" y="3429000"/>
-            <a:ext cx="3093415" cy="2606040"/>
+            <a:off x="8321040" y="3246120"/>
+            <a:ext cx="3093415" cy="2862072"/>
           </a:xfrm>
           <a:prstGeom prst="rect">
             <a:avLst/>
@@ -7578,12 +7580,12 @@
         </p:nvSpPr>
         <p:spPr>
           <a:xfrm>
-            <a:off x="8092440" y="2834640"/>
-            <a:ext cx="3550615" cy="3383280"/>
+            <a:off x="8092440" y="2788920"/>
+            <a:ext cx="3550615" cy="3429000"/>
           </a:xfrm>
           <a:prstGeom prst="roundRect">
             <a:avLst>
-              <a:gd name="adj" fmla="val 2162"/>
+              <a:gd name="adj" fmla="val 2133"/>
             </a:avLst>
           </a:prstGeom>
           <a:solidFill>
@@ -7605,8 +7607,8 @@
         </p:nvSpPr>
         <p:spPr>
           <a:xfrm>
-            <a:off x="8321040" y="2971800"/>
-            <a:ext cx="3093415" cy="365760"/>
+            <a:off x="8321040" y="2880360"/>
+            <a:ext cx="3093415" cy="310896"/>
           </a:xfrm>
           <a:prstGeom prst="rect">
             <a:avLst/>
@@ -7622,7 +7624,7 @@
               <a:buNone/>
             </a:pPr>
             <a:r>
-              <a:rPr lang="en-US" sz="1500" b="1" dirty="0">
+              <a:rPr lang="en-US" sz="1400" b="1" dirty="0">
                 <a:solidFill>
                   <a:srgbClr val="2F7D4F"/>
                 </a:solidFill>
@@ -7632,7 +7634,7 @@
               </a:rPr>
               <a:t>Expected result</a:t>
             </a:r>
-            <a:endParaRPr lang="en-US" sz="1500" dirty="0"/>
+            <a:endParaRPr lang="en-US" sz="1400" dirty="0"/>
           </a:p>
         </p:txBody>
       </p:sp>
@@ -7644,8 +7646,8 @@
         </p:nvSpPr>
         <p:spPr>
           <a:xfrm>
-            <a:off x="8321040" y="3429000"/>
-            <a:ext cx="3093415" cy="2606040"/>
+            <a:off x="8321040" y="3246120"/>
+            <a:ext cx="3093415" cy="2862072"/>
           </a:xfrm>
           <a:prstGeom prst="rect">
             <a:avLst/>
@@ -10849,12 +10851,12 @@
         </p:nvSpPr>
         <p:spPr>
           <a:xfrm>
-            <a:off x="8092440" y="2834640"/>
-            <a:ext cx="3550615" cy="3383280"/>
+            <a:off x="8092440" y="2788920"/>
+            <a:ext cx="3550615" cy="3429000"/>
           </a:xfrm>
           <a:prstGeom prst="roundRect">
             <a:avLst>
-              <a:gd name="adj" fmla="val 2162"/>
+              <a:gd name="adj" fmla="val 2133"/>
             </a:avLst>
           </a:prstGeom>
           <a:solidFill>
@@ -10876,8 +10878,8 @@
         </p:nvSpPr>
         <p:spPr>
           <a:xfrm>
-            <a:off x="8321040" y="2971800"/>
-            <a:ext cx="3093415" cy="365760"/>
+            <a:off x="8321040" y="2880360"/>
+            <a:ext cx="3093415" cy="310896"/>
           </a:xfrm>
           <a:prstGeom prst="rect">
             <a:avLst/>
@@ -10893,7 +10895,7 @@
               <a:buNone/>
             </a:pPr>
             <a:r>
-              <a:rPr lang="en-US" sz="1500" b="1" dirty="0">
+              <a:rPr lang="en-US" sz="1400" b="1" dirty="0">
                 <a:solidFill>
                   <a:srgbClr val="2F7D4F"/>
                 </a:solidFill>
@@ -10903,7 +10905,7 @@
               </a:rPr>
               <a:t>Expected result</a:t>
             </a:r>
-            <a:endParaRPr lang="en-US" sz="1500" dirty="0"/>
+            <a:endParaRPr lang="en-US" sz="1400" dirty="0"/>
           </a:p>
         </p:txBody>
       </p:sp>
@@ -10915,8 +10917,8 @@
         </p:nvSpPr>
         <p:spPr>
           <a:xfrm>
-            <a:off x="8321040" y="3429000"/>
-            <a:ext cx="3093415" cy="2606040"/>
+            <a:off x="8321040" y="3246120"/>
+            <a:ext cx="3093415" cy="2862072"/>
           </a:xfrm>
           <a:prstGeom prst="rect">
             <a:avLst/>
@@ -11431,12 +11433,12 @@
         </p:nvSpPr>
         <p:spPr>
           <a:xfrm>
-            <a:off x="8092440" y="2834640"/>
-            <a:ext cx="3550615" cy="3383280"/>
+            <a:off x="8092440" y="2788920"/>
+            <a:ext cx="3550615" cy="3429000"/>
           </a:xfrm>
           <a:prstGeom prst="roundRect">
             <a:avLst>
-              <a:gd name="adj" fmla="val 2162"/>
+              <a:gd name="adj" fmla="val 2133"/>
             </a:avLst>
           </a:prstGeom>
           <a:solidFill>
@@ -11458,8 +11460,8 @@
         </p:nvSpPr>
         <p:spPr>
           <a:xfrm>
-            <a:off x="8321040" y="2971800"/>
-            <a:ext cx="3093415" cy="365760"/>
+            <a:off x="8321040" y="2880360"/>
+            <a:ext cx="3093415" cy="310896"/>
           </a:xfrm>
           <a:prstGeom prst="rect">
             <a:avLst/>
@@ -11475,7 +11477,7 @@
               <a:buNone/>
             </a:pPr>
             <a:r>
-              <a:rPr lang="en-US" sz="1500" b="1" dirty="0">
+              <a:rPr lang="en-US" sz="1400" b="1" dirty="0">
                 <a:solidFill>
                   <a:srgbClr val="2F7D4F"/>
                 </a:solidFill>
@@ -11485,7 +11487,7 @@
               </a:rPr>
               <a:t>Expected result</a:t>
             </a:r>
-            <a:endParaRPr lang="en-US" sz="1500" dirty="0"/>
+            <a:endParaRPr lang="en-US" sz="1400" dirty="0"/>
           </a:p>
         </p:txBody>
       </p:sp>
@@ -11497,8 +11499,8 @@
         </p:nvSpPr>
         <p:spPr>
           <a:xfrm>
-            <a:off x="8321040" y="3429000"/>
-            <a:ext cx="3093415" cy="2606040"/>
+            <a:off x="8321040" y="3246120"/>
+            <a:ext cx="3093415" cy="2862072"/>
           </a:xfrm>
           <a:prstGeom prst="rect">
             <a:avLst/>
@@ -12933,12 +12935,12 @@
         </p:nvSpPr>
         <p:spPr>
           <a:xfrm>
-            <a:off x="8092440" y="2834640"/>
-            <a:ext cx="3550615" cy="3383280"/>
+            <a:off x="8092440" y="2788920"/>
+            <a:ext cx="3550615" cy="3429000"/>
           </a:xfrm>
           <a:prstGeom prst="roundRect">
             <a:avLst>
-              <a:gd name="adj" fmla="val 2162"/>
+              <a:gd name="adj" fmla="val 2133"/>
             </a:avLst>
           </a:prstGeom>
           <a:solidFill>
@@ -12960,8 +12962,8 @@
         </p:nvSpPr>
         <p:spPr>
           <a:xfrm>
-            <a:off x="8321040" y="2971800"/>
-            <a:ext cx="3093415" cy="365760"/>
+            <a:off x="8321040" y="2880360"/>
+            <a:ext cx="3093415" cy="310896"/>
           </a:xfrm>
           <a:prstGeom prst="rect">
             <a:avLst/>
@@ -12977,7 +12979,7 @@
               <a:buNone/>
             </a:pPr>
             <a:r>
-              <a:rPr lang="en-US" sz="1500" b="1" dirty="0">
+              <a:rPr lang="en-US" sz="1400" b="1" dirty="0">
                 <a:solidFill>
                   <a:srgbClr val="2F7D4F"/>
                 </a:solidFill>
@@ -12987,7 +12989,7 @@
               </a:rPr>
               <a:t>Expected result</a:t>
             </a:r>
-            <a:endParaRPr lang="en-US" sz="1500" dirty="0"/>
+            <a:endParaRPr lang="en-US" sz="1400" dirty="0"/>
           </a:p>
         </p:txBody>
       </p:sp>
@@ -12999,8 +13001,8 @@
         </p:nvSpPr>
         <p:spPr>
           <a:xfrm>
-            <a:off x="8321040" y="3429000"/>
-            <a:ext cx="3093415" cy="2606040"/>
+            <a:off x="8321040" y="3246120"/>
+            <a:ext cx="3093415" cy="2862072"/>
           </a:xfrm>
           <a:prstGeom prst="rect">
             <a:avLst/>
@@ -13860,7 +13862,7 @@
               <a:buNone/>
             </a:pPr>
             <a:r>
-              <a:rPr lang="en-US" sz="1200" dirty="0">
+              <a:rPr lang="en-US" sz="1150" dirty="0">
                 <a:solidFill>
                   <a:srgbClr val="8FB3A0"/>
                 </a:solidFill>
@@ -13870,14 +13872,14 @@
               </a:rPr>
               <a:t>#!/usr/bin/env bash</a:t>
             </a:r>
-            <a:endParaRPr lang="en-US" sz="1200" dirty="0"/>
+            <a:endParaRPr lang="en-US" sz="1150" dirty="0"/>
           </a:p>
           <a:p>
             <a:pPr indent="0" marL="0">
               <a:buNone/>
             </a:pPr>
             <a:r>
-              <a:rPr lang="en-US" sz="1200" dirty="0">
+              <a:rPr lang="en-US" sz="1150" dirty="0">
                 <a:solidFill>
                   <a:srgbClr val="8FB3A0"/>
                 </a:solidFill>
@@ -13887,14 +13889,14 @@
               </a:rPr>
               <a:t># Optional: let "Compile Cartridge" produce real .prg32 files.</a:t>
             </a:r>
-            <a:endParaRPr lang="en-US" sz="1200" dirty="0"/>
+            <a:endParaRPr lang="en-US" sz="1150" dirty="0"/>
           </a:p>
           <a:p>
             <a:pPr indent="0" marL="0">
               <a:buNone/>
             </a:pPr>
             <a:r>
-              <a:rPr lang="en-US" sz="1200" dirty="0">
+              <a:rPr lang="en-US" sz="1150" dirty="0">
                 <a:solidFill>
                   <a:srgbClr val="E6EDF2"/>
                 </a:solidFill>
@@ -13904,14 +13906,14 @@
               </a:rPr>
               <a:t>. "$HOME/esp-idf/export.sh"</a:t>
             </a:r>
-            <a:endParaRPr lang="en-US" sz="1200" dirty="0"/>
+            <a:endParaRPr lang="en-US" sz="1150" dirty="0"/>
           </a:p>
           <a:p>
             <a:pPr indent="0" marL="0">
               <a:buNone/>
             </a:pPr>
             <a:r>
-              <a:rPr lang="en-US" sz="1200" dirty="0">
+              <a:rPr lang="en-US" sz="1150" dirty="0">
                 <a:solidFill>
                   <a:srgbClr val="E6EDF2"/>
                 </a:solidFill>
@@ -13925,7 +13927,7 @@
               <a:buNone/>
             </a:pPr>
             <a:r>
-              <a:rPr lang="en-US" sz="1200" dirty="0">
+              <a:rPr lang="en-US" sz="1150" dirty="0">
                 <a:solidFill>
                   <a:srgbClr val="8FB3A0"/>
                 </a:solidFill>
@@ -13935,14 +13937,14 @@
               </a:rPr>
               <a:t> # where the prg32 module lives</a:t>
             </a:r>
-            <a:endParaRPr lang="en-US" sz="1200" dirty="0"/>
+            <a:endParaRPr lang="en-US" sz="1150" dirty="0"/>
           </a:p>
           <a:p>
             <a:pPr indent="0" marL="0">
               <a:buNone/>
             </a:pPr>
             <a:r>
-              <a:rPr lang="en-US" sz="1200" dirty="0">
+              <a:rPr lang="en-US" sz="1150" dirty="0">
                 <a:solidFill>
                   <a:srgbClr val="E6EDF2"/>
                 </a:solidFill>
@@ -13956,7 +13958,7 @@
               <a:buNone/>
             </a:pPr>
             <a:r>
-              <a:rPr lang="en-US" sz="1200" dirty="0">
+              <a:rPr lang="en-US" sz="1150" dirty="0">
                 <a:solidFill>
                   <a:srgbClr val="8FB3A0"/>
                 </a:solidFill>
@@ -13966,14 +13968,14 @@
               </a:rPr>
               <a:t> # must work in this shell</a:t>
             </a:r>
-            <a:endParaRPr lang="en-US" sz="1200" dirty="0"/>
+            <a:endParaRPr lang="en-US" sz="1150" dirty="0"/>
           </a:p>
           <a:p>
             <a:pPr indent="0" marL="0">
               <a:buNone/>
             </a:pPr>
             <a:r>
-              <a:rPr lang="en-US" sz="1200" dirty="0">
+              <a:rPr lang="en-US" sz="1150" dirty="0">
                 <a:solidFill>
                   <a:srgbClr val="E6EDF2"/>
                 </a:solidFill>
@@ -13983,14 +13985,14 @@
               </a:rPr>
               <a:t>export PRG32_STORE_URL="http://127.0.0.1:5080"</a:t>
             </a:r>
-            <a:endParaRPr lang="en-US" sz="1200" dirty="0"/>
+            <a:endParaRPr lang="en-US" sz="1150" dirty="0"/>
           </a:p>
           <a:p>
             <a:pPr indent="0" marL="0">
               <a:buNone/>
             </a:pPr>
             <a:r>
-              <a:rPr lang="en-US" sz="1200" dirty="0">
+              <a:rPr lang="en-US" sz="1150" dirty="0">
                 <a:solidFill>
                   <a:srgbClr val="E6EDF2"/>
                 </a:solidFill>
@@ -14000,7 +14002,7 @@
               </a:rPr>
               <a:t>python app.py</a:t>
             </a:r>
-            <a:endParaRPr lang="en-US" sz="1200" dirty="0"/>
+            <a:endParaRPr lang="en-US" sz="1150" dirty="0"/>
           </a:p>
         </p:txBody>
       </p:sp>
@@ -14801,12 +14803,12 @@
         </p:nvSpPr>
         <p:spPr>
           <a:xfrm>
-            <a:off x="8092440" y="2834640"/>
-            <a:ext cx="3550615" cy="3383280"/>
+            <a:off x="8092440" y="2788920"/>
+            <a:ext cx="3550615" cy="3429000"/>
           </a:xfrm>
           <a:prstGeom prst="roundRect">
             <a:avLst>
-              <a:gd name="adj" fmla="val 2162"/>
+              <a:gd name="adj" fmla="val 2133"/>
             </a:avLst>
           </a:prstGeom>
           <a:solidFill>
@@ -14828,8 +14830,8 @@
         </p:nvSpPr>
         <p:spPr>
           <a:xfrm>
-            <a:off x="8321040" y="2971800"/>
-            <a:ext cx="3093415" cy="365760"/>
+            <a:off x="8321040" y="2880360"/>
+            <a:ext cx="3093415" cy="310896"/>
           </a:xfrm>
           <a:prstGeom prst="rect">
             <a:avLst/>
@@ -14845,7 +14847,7 @@
               <a:buNone/>
             </a:pPr>
             <a:r>
-              <a:rPr lang="en-US" sz="1500" b="1" dirty="0">
+              <a:rPr lang="en-US" sz="1400" b="1" dirty="0">
                 <a:solidFill>
                   <a:srgbClr val="2F7D4F"/>
                 </a:solidFill>
@@ -14855,7 +14857,7 @@
               </a:rPr>
               <a:t>Expected result</a:t>
             </a:r>
-            <a:endParaRPr lang="en-US" sz="1500" dirty="0"/>
+            <a:endParaRPr lang="en-US" sz="1400" dirty="0"/>
           </a:p>
         </p:txBody>
       </p:sp>
@@ -14867,8 +14869,8 @@
         </p:nvSpPr>
         <p:spPr>
           <a:xfrm>
-            <a:off x="8321040" y="3429000"/>
-            <a:ext cx="3093415" cy="2606040"/>
+            <a:off x="8321040" y="3246120"/>
+            <a:ext cx="3093415" cy="2862072"/>
           </a:xfrm>
           <a:prstGeom prst="rect">
             <a:avLst/>
@@ -17687,7 +17689,7 @@
               <a:buNone/>
             </a:pPr>
             <a:r>
-              <a:rPr lang="en-US" sz="1300" dirty="0">
+              <a:rPr lang="en-US" sz="1250" dirty="0">
                 <a:solidFill>
                   <a:srgbClr val="8FB3A0"/>
                 </a:solidFill>
@@ -17697,14 +17699,14 @@
               </a:rPr>
               <a:t>#!/usr/bin/env bash</a:t>
             </a:r>
-            <a:endParaRPr lang="en-US" sz="1300" dirty="0"/>
+            <a:endParaRPr lang="en-US" sz="1250" dirty="0"/>
           </a:p>
           <a:p>
             <a:pPr indent="0" marL="0">
               <a:buNone/>
             </a:pPr>
             <a:r>
-              <a:rPr lang="en-US" sz="1300" dirty="0">
+              <a:rPr lang="en-US" sz="1250" dirty="0">
                 <a:solidFill>
                   <a:srgbClr val="E6EDF2"/>
                 </a:solidFill>
@@ -17714,14 +17716,14 @@
               </a:rPr>
               <a:t>git clone https://github.com/riscv-prg32/PRG32-Construction-Kit.git</a:t>
             </a:r>
-            <a:endParaRPr lang="en-US" sz="1300" dirty="0"/>
+            <a:endParaRPr lang="en-US" sz="1250" dirty="0"/>
           </a:p>
           <a:p>
             <a:pPr indent="0" marL="0">
               <a:buNone/>
             </a:pPr>
             <a:r>
-              <a:rPr lang="en-US" sz="1300" dirty="0">
+              <a:rPr lang="en-US" sz="1250" dirty="0">
                 <a:solidFill>
                   <a:srgbClr val="E6EDF2"/>
                 </a:solidFill>
@@ -17731,14 +17733,14 @@
               </a:rPr>
               <a:t>cd PRG32-Construction-Kit</a:t>
             </a:r>
-            <a:endParaRPr lang="en-US" sz="1300" dirty="0"/>
+            <a:endParaRPr lang="en-US" sz="1250" dirty="0"/>
           </a:p>
           <a:p>
             <a:pPr indent="0" marL="0">
               <a:buNone/>
             </a:pPr>
             <a:r>
-              <a:rPr lang="en-US" sz="1300" dirty="0">
+              <a:rPr lang="en-US" sz="1250" dirty="0">
                 <a:solidFill>
                   <a:srgbClr val="E6EDF2"/>
                 </a:solidFill>
@@ -17748,14 +17750,14 @@
               </a:rPr>
               <a:t>python3 -m venv .venv</a:t>
             </a:r>
-            <a:endParaRPr lang="en-US" sz="1300" dirty="0"/>
+            <a:endParaRPr lang="en-US" sz="1250" dirty="0"/>
           </a:p>
           <a:p>
             <a:pPr indent="0" marL="0">
               <a:buNone/>
             </a:pPr>
             <a:r>
-              <a:rPr lang="en-US" sz="1300" dirty="0">
+              <a:rPr lang="en-US" sz="1250" dirty="0">
                 <a:solidFill>
                   <a:srgbClr val="E6EDF2"/>
                 </a:solidFill>
@@ -17765,14 +17767,14 @@
               </a:rPr>
               <a:t>. .venv/bin/activate</a:t>
             </a:r>
-            <a:endParaRPr lang="en-US" sz="1300" dirty="0"/>
+            <a:endParaRPr lang="en-US" sz="1250" dirty="0"/>
           </a:p>
           <a:p>
             <a:pPr indent="0" marL="0">
               <a:buNone/>
             </a:pPr>
             <a:r>
-              <a:rPr lang="en-US" sz="1300" dirty="0">
+              <a:rPr lang="en-US" sz="1250" dirty="0">
                 <a:solidFill>
                   <a:srgbClr val="E6EDF2"/>
                 </a:solidFill>
@@ -17782,14 +17784,14 @@
               </a:rPr>
               <a:t>pip install -r requirements.txt</a:t>
             </a:r>
-            <a:endParaRPr lang="en-US" sz="1300" dirty="0"/>
+            <a:endParaRPr lang="en-US" sz="1250" dirty="0"/>
           </a:p>
           <a:p>
             <a:pPr indent="0" marL="0">
               <a:buNone/>
             </a:pPr>
             <a:r>
-              <a:rPr lang="en-US" sz="1300" dirty="0">
+              <a:rPr lang="en-US" sz="1250" dirty="0">
                 <a:solidFill>
                   <a:srgbClr val="E6EDF2"/>
                 </a:solidFill>
@@ -17803,7 +17805,7 @@
               <a:buNone/>
             </a:pPr>
             <a:r>
-              <a:rPr lang="en-US" sz="1300" dirty="0">
+              <a:rPr lang="en-US" sz="1250" dirty="0">
                 <a:solidFill>
                   <a:srgbClr val="8FB3A0"/>
                 </a:solidFill>
@@ -17813,7 +17815,7 @@
               </a:rPr>
               <a:t> # then open http://127.0.0.1:5090/</a:t>
             </a:r>
-            <a:endParaRPr lang="en-US" sz="1300" dirty="0"/>
+            <a:endParaRPr lang="en-US" sz="1250" dirty="0"/>
           </a:p>
         </p:txBody>
       </p:sp>
@@ -18808,12 +18810,12 @@
         </p:nvSpPr>
         <p:spPr>
           <a:xfrm>
-            <a:off x="8092440" y="2834640"/>
-            <a:ext cx="3550615" cy="3383280"/>
+            <a:off x="8092440" y="2788920"/>
+            <a:ext cx="3550615" cy="3429000"/>
           </a:xfrm>
           <a:prstGeom prst="roundRect">
             <a:avLst>
-              <a:gd name="adj" fmla="val 2162"/>
+              <a:gd name="adj" fmla="val 2133"/>
             </a:avLst>
           </a:prstGeom>
           <a:solidFill>
@@ -18835,8 +18837,8 @@
         </p:nvSpPr>
         <p:spPr>
           <a:xfrm>
-            <a:off x="8321040" y="2971800"/>
-            <a:ext cx="3093415" cy="365760"/>
+            <a:off x="8321040" y="2880360"/>
+            <a:ext cx="3093415" cy="310896"/>
           </a:xfrm>
           <a:prstGeom prst="rect">
             <a:avLst/>
@@ -18852,7 +18854,7 @@
               <a:buNone/>
             </a:pPr>
             <a:r>
-              <a:rPr lang="en-US" sz="1500" b="1" dirty="0">
+              <a:rPr lang="en-US" sz="1400" b="1" dirty="0">
                 <a:solidFill>
                   <a:srgbClr val="2F7D4F"/>
                 </a:solidFill>
@@ -18862,7 +18864,7 @@
               </a:rPr>
               <a:t>Expected result</a:t>
             </a:r>
-            <a:endParaRPr lang="en-US" sz="1500" dirty="0"/>
+            <a:endParaRPr lang="en-US" sz="1400" dirty="0"/>
           </a:p>
         </p:txBody>
       </p:sp>
@@ -18874,8 +18876,8 @@
         </p:nvSpPr>
         <p:spPr>
           <a:xfrm>
-            <a:off x="8321040" y="3429000"/>
-            <a:ext cx="3093415" cy="2606040"/>
+            <a:off x="8321040" y="3246120"/>
+            <a:ext cx="3093415" cy="2862072"/>
           </a:xfrm>
           <a:prstGeom prst="rect">
             <a:avLst/>
@@ -19390,12 +19392,12 @@
         </p:nvSpPr>
         <p:spPr>
           <a:xfrm>
-            <a:off x="8092440" y="2834640"/>
-            <a:ext cx="3550615" cy="3383280"/>
+            <a:off x="8092440" y="2788920"/>
+            <a:ext cx="3550615" cy="3429000"/>
           </a:xfrm>
           <a:prstGeom prst="roundRect">
             <a:avLst>
-              <a:gd name="adj" fmla="val 2162"/>
+              <a:gd name="adj" fmla="val 2133"/>
             </a:avLst>
           </a:prstGeom>
           <a:solidFill>
@@ -19417,8 +19419,8 @@
         </p:nvSpPr>
         <p:spPr>
           <a:xfrm>
-            <a:off x="8321040" y="2971800"/>
-            <a:ext cx="3093415" cy="365760"/>
+            <a:off x="8321040" y="2880360"/>
+            <a:ext cx="3093415" cy="310896"/>
           </a:xfrm>
           <a:prstGeom prst="rect">
             <a:avLst/>
@@ -19434,7 +19436,7 @@
               <a:buNone/>
             </a:pPr>
             <a:r>
-              <a:rPr lang="en-US" sz="1500" b="1" dirty="0">
+              <a:rPr lang="en-US" sz="1400" b="1" dirty="0">
                 <a:solidFill>
                   <a:srgbClr val="2F7D4F"/>
                 </a:solidFill>
@@ -19444,7 +19446,7 @@
               </a:rPr>
               <a:t>Expected result</a:t>
             </a:r>
-            <a:endParaRPr lang="en-US" sz="1500" dirty="0"/>
+            <a:endParaRPr lang="en-US" sz="1400" dirty="0"/>
           </a:p>
         </p:txBody>
       </p:sp>
@@ -19456,8 +19458,8 @@
         </p:nvSpPr>
         <p:spPr>
           <a:xfrm>
-            <a:off x="8321040" y="3429000"/>
-            <a:ext cx="3093415" cy="2606040"/>
+            <a:off x="8321040" y="3246120"/>
+            <a:ext cx="3093415" cy="2862072"/>
           </a:xfrm>
           <a:prstGeom prst="rect">
             <a:avLst/>

--- a/presentations/15-teaching-construction-kit/15-teaching-construction-kit-lab.pptx
+++ b/presentations/15-teaching-construction-kit/15-teaching-construction-kit-lab.pptx
@@ -136,7 +136,7 @@
   <p:extLst>
     <p:ext uri="{521415D9-36F7-43E2-AB2F-B90AF26B5E84}">
       <p14:sectionLst xmlns:p14="http://schemas.microsoft.com/office/powerpoint/2010/main">
-        <p14:section name="Opening" id="{0c6d1cfe-534c-ab08-69e9-8e54f5f34f70}">
+        <p14:section name="Opening" id="{bd0050b7-eef1-96e7-92cf-12bf88dc4066}">
           <p14:sldIdLst>
             <p14:sldId id="256"/>
             <p14:sldId id="257"/>
@@ -144,7 +144,7 @@
             <p14:sldId id="259"/>
           </p14:sldIdLst>
         </p14:section>
-        <p14:section name="Install and start" id="{2f17ddc0-91f7-56ba-eac2-8c2c63f8b273}">
+        <p14:section name="Install and start" id="{d9880c91-12ab-8382-05f7-8f727e097b24}">
           <p14:sldIdLst>
             <p14:sldId id="260"/>
             <p14:sldId id="261"/>
@@ -153,7 +153,7 @@
             <p14:sldId id="264"/>
           </p14:sldIdLst>
         </p14:section>
-        <p14:section name="Import and play" id="{7de5200a-9bbe-ea98-cb54-41c95050eab3}">
+        <p14:section name="Import and play" id="{495d1406-adef-a4a9-febd-da004bca9570}">
           <p14:sldIdLst>
             <p14:sldId id="265"/>
             <p14:sldId id="266"/>
@@ -161,7 +161,7 @@
             <p14:sldId id="268"/>
           </p14:sldIdLst>
         </p14:section>
-        <p14:section name="Step and Generate C" id="{90dcb8b8-4657-a78e-9b8f-2c7e08f8afe9}">
+        <p14:section name="Step and Generate C" id="{554c915c-7939-a1f5-680a-c0f0f9632415}">
           <p14:sldIdLst>
             <p14:sldId id="269"/>
             <p14:sldId id="270"/>
@@ -170,7 +170,7 @@
             <p14:sldId id="273"/>
           </p14:sldIdLst>
         </p14:section>
-        <p14:section name="Micro-teaching" id="{b6d25e7d-96ec-0027-0ee2-d8895cb800fd}">
+        <p14:section name="Micro-teaching" id="{0259b9db-f5d9-b7f3-f2a8-f4b142ee58bf}">
           <p14:sldIdLst>
             <p14:sldId id="274"/>
             <p14:sldId id="275"/>
@@ -180,7 +180,7 @@
             <p14:sldId id="279"/>
           </p14:sldIdLst>
         </p14:section>
-        <p14:section name="Publishing decisions" id="{793e28ce-8683-f78b-1f51-b6e1eb133a2f}">
+        <p14:section name="Publishing decisions" id="{fdb77208-5dfb-915f-f01d-5165d0ca9ed1}">
           <p14:sldIdLst>
             <p14:sldId id="280"/>
             <p14:sldId id="281"/>
@@ -189,7 +189,7 @@
             <p14:sldId id="284"/>
           </p14:sldIdLst>
         </p14:section>
-        <p14:section name="Closing" id="{6afee947-3f6f-6430-b900-6253b5f4ad9b}">
+        <p14:section name="Closing" id="{e3625427-403f-d8c8-7d6d-92e5caa61c28}">
           <p14:sldIdLst>
             <p14:sldId id="285"/>
           </p14:sldIdLst>
@@ -13862,7 +13862,7 @@
               <a:buNone/>
             </a:pPr>
             <a:r>
-              <a:rPr lang="en-US" sz="1150" dirty="0">
+              <a:rPr lang="en-US" sz="1250" dirty="0">
                 <a:solidFill>
                   <a:srgbClr val="8FB3A0"/>
                 </a:solidFill>
@@ -13872,14 +13872,14 @@
               </a:rPr>
               <a:t>#!/usr/bin/env bash</a:t>
             </a:r>
-            <a:endParaRPr lang="en-US" sz="1150" dirty="0"/>
+            <a:endParaRPr lang="en-US" sz="1250" dirty="0"/>
           </a:p>
           <a:p>
             <a:pPr indent="0" marL="0">
               <a:buNone/>
             </a:pPr>
             <a:r>
-              <a:rPr lang="en-US" sz="1150" dirty="0">
+              <a:rPr lang="en-US" sz="1250" dirty="0">
                 <a:solidFill>
                   <a:srgbClr val="8FB3A0"/>
                 </a:solidFill>
@@ -13889,14 +13889,14 @@
               </a:rPr>
               <a:t># Optional: let "Compile Cartridge" produce real .prg32 files.</a:t>
             </a:r>
-            <a:endParaRPr lang="en-US" sz="1150" dirty="0"/>
+            <a:endParaRPr lang="en-US" sz="1250" dirty="0"/>
           </a:p>
           <a:p>
             <a:pPr indent="0" marL="0">
               <a:buNone/>
             </a:pPr>
             <a:r>
-              <a:rPr lang="en-US" sz="1150" dirty="0">
+              <a:rPr lang="en-US" sz="1250" dirty="0">
                 <a:solidFill>
                   <a:srgbClr val="E6EDF2"/>
                 </a:solidFill>
@@ -13906,14 +13906,14 @@
               </a:rPr>
               <a:t>. "$HOME/esp-idf/export.sh"</a:t>
             </a:r>
-            <a:endParaRPr lang="en-US" sz="1150" dirty="0"/>
+            <a:endParaRPr lang="en-US" sz="1250" dirty="0"/>
           </a:p>
           <a:p>
             <a:pPr indent="0" marL="0">
               <a:buNone/>
             </a:pPr>
             <a:r>
-              <a:rPr lang="en-US" sz="1150" dirty="0">
+              <a:rPr lang="en-US" sz="1250" dirty="0">
                 <a:solidFill>
                   <a:srgbClr val="E6EDF2"/>
                 </a:solidFill>
@@ -13927,7 +13927,7 @@
               <a:buNone/>
             </a:pPr>
             <a:r>
-              <a:rPr lang="en-US" sz="1150" dirty="0">
+              <a:rPr lang="en-US" sz="1250" dirty="0">
                 <a:solidFill>
                   <a:srgbClr val="8FB3A0"/>
                 </a:solidFill>
@@ -13935,16 +13935,16 @@
                 <a:ea typeface="Courier New" pitchFamily="34" charset="-122"/>
                 <a:cs typeface="Courier New" pitchFamily="34" charset="-120"/>
               </a:rPr>
-              <a:t> # where the prg32 module lives</a:t>
-            </a:r>
-            <a:endParaRPr lang="en-US" sz="1150" dirty="0"/>
+              <a:t> # where the prg32 module</a:t>
+            </a:r>
+            <a:endParaRPr lang="en-US" sz="1250" dirty="0"/>
           </a:p>
           <a:p>
             <a:pPr indent="0" marL="0">
               <a:buNone/>
             </a:pPr>
             <a:r>
-              <a:rPr lang="en-US" sz="1150" dirty="0">
+              <a:rPr lang="en-US" sz="1250" dirty="0">
                 <a:solidFill>
                   <a:srgbClr val="E6EDF2"/>
                 </a:solidFill>
@@ -13952,47 +13952,47 @@
                 <a:ea typeface="Courier New" pitchFamily="34" charset="-122"/>
                 <a:cs typeface="Courier New" pitchFamily="34" charset="-120"/>
               </a:rPr>
-              <a:t>python3 -m prg32 cartridge build --help   </a:t>
-            </a:r>
+              <a:t>    lives</a:t>
+            </a:r>
+            <a:endParaRPr lang="en-US" sz="1250" dirty="0"/>
+          </a:p>
+          <a:p>
             <a:pPr indent="0" marL="0">
               <a:buNone/>
             </a:pPr>
             <a:r>
-              <a:rPr lang="en-US" sz="1150" dirty="0">
-                <a:solidFill>
-                  <a:srgbClr val="8FB3A0"/>
+              <a:rPr lang="en-US" sz="1250" dirty="0">
+                <a:solidFill>
+                  <a:srgbClr val="E6EDF2"/>
                 </a:solidFill>
                 <a:latin typeface="Courier New" pitchFamily="34" charset="0"/>
                 <a:ea typeface="Courier New" pitchFamily="34" charset="-122"/>
                 <a:cs typeface="Courier New" pitchFamily="34" charset="-120"/>
               </a:rPr>
-              <a:t> # must work in this shell</a:t>
-            </a:r>
-            <a:endParaRPr lang="en-US" sz="1150" dirty="0"/>
-          </a:p>
-          <a:p>
+              <a:t>python3 -m prg32 cartridge build --help   </a:t>
+            </a:r>
             <a:pPr indent="0" marL="0">
               <a:buNone/>
             </a:pPr>
             <a:r>
-              <a:rPr lang="en-US" sz="1150" dirty="0">
-                <a:solidFill>
-                  <a:srgbClr val="E6EDF2"/>
+              <a:rPr lang="en-US" sz="1250" dirty="0">
+                <a:solidFill>
+                  <a:srgbClr val="8FB3A0"/>
                 </a:solidFill>
                 <a:latin typeface="Courier New" pitchFamily="34" charset="0"/>
                 <a:ea typeface="Courier New" pitchFamily="34" charset="-122"/>
                 <a:cs typeface="Courier New" pitchFamily="34" charset="-120"/>
               </a:rPr>
-              <a:t>export PRG32_STORE_URL="http://127.0.0.1:5080"</a:t>
-            </a:r>
-            <a:endParaRPr lang="en-US" sz="1150" dirty="0"/>
+              <a:t> # must work in this shell</a:t>
+            </a:r>
+            <a:endParaRPr lang="en-US" sz="1250" dirty="0"/>
           </a:p>
           <a:p>
             <a:pPr indent="0" marL="0">
               <a:buNone/>
             </a:pPr>
             <a:r>
-              <a:rPr lang="en-US" sz="1150" dirty="0">
+              <a:rPr lang="en-US" sz="1250" dirty="0">
                 <a:solidFill>
                   <a:srgbClr val="E6EDF2"/>
                 </a:solidFill>
@@ -14000,9 +14000,26 @@
                 <a:ea typeface="Courier New" pitchFamily="34" charset="-122"/>
                 <a:cs typeface="Courier New" pitchFamily="34" charset="-120"/>
               </a:rPr>
+              <a:t>export PRG32_STORE_URL="http://127.0.0.1:5080"</a:t>
+            </a:r>
+            <a:endParaRPr lang="en-US" sz="1250" dirty="0"/>
+          </a:p>
+          <a:p>
+            <a:pPr indent="0" marL="0">
+              <a:buNone/>
+            </a:pPr>
+            <a:r>
+              <a:rPr lang="en-US" sz="1250" dirty="0">
+                <a:solidFill>
+                  <a:srgbClr val="E6EDF2"/>
+                </a:solidFill>
+                <a:latin typeface="Courier New" pitchFamily="34" charset="0"/>
+                <a:ea typeface="Courier New" pitchFamily="34" charset="-122"/>
+                <a:cs typeface="Courier New" pitchFamily="34" charset="-120"/>
+              </a:rPr>
               <a:t>python app.py</a:t>
             </a:r>
-            <a:endParaRPr lang="en-US" sz="1150" dirty="0"/>
+            <a:endParaRPr lang="en-US" sz="1250" dirty="0"/>
           </a:p>
         </p:txBody>
       </p:sp>
